--- a/Tactical_Workflow.pptx
+++ b/Tactical_Workflow.pptx
@@ -3357,7 +3357,7 @@
                 </a:solidFill>
                 <a:latin typeface="Calibri"/>
               </a:rPr>
-              <a:t>Meridian Family Office Copilot   ·   v6 · Tactical instructions   ·   For partner &amp; client discussion</a:t>
+              <a:t>Meridian Family Office Copilot   ·   v7 · Tactical instructions   ·   For partner &amp; client discussion</a:t>
             </a:r>
           </a:p>
         </p:txBody>
@@ -3512,7 +3512,7 @@
                 </a:solidFill>
                 <a:latin typeface="Georgia"/>
               </a:rPr>
-              <a:t>Four steps in, two outputs out</a:t>
+              <a:t>Four steps in, three outputs out</a:t>
             </a:r>
           </a:p>
         </p:txBody>
@@ -3569,7 +3569,7 @@
         <p:spPr>
           <a:xfrm>
             <a:off x="786384" y="2834640"/>
-            <a:ext cx="1600200" cy="1737360"/>
+            <a:ext cx="1342861" cy="1737360"/>
           </a:xfrm>
           <a:prstGeom prst="roundRect">
             <a:avLst>
@@ -3679,7 +3679,7 @@
         </p:nvSpPr>
         <p:spPr>
           <a:xfrm>
-            <a:off x="2368296" y="3520439"/>
+            <a:off x="2110957" y="3520439"/>
             <a:ext cx="274320" cy="365760"/>
           </a:xfrm>
           <a:prstGeom prst="rect">
@@ -3722,8 +3722,8 @@
         </p:nvSpPr>
         <p:spPr>
           <a:xfrm>
-            <a:off x="2587752" y="2834640"/>
-            <a:ext cx="1600200" cy="1737360"/>
+            <a:off x="2330413" y="2834640"/>
+            <a:ext cx="1342861" cy="1737360"/>
           </a:xfrm>
           <a:prstGeom prst="roundRect">
             <a:avLst>
@@ -3833,7 +3833,7 @@
         </p:nvSpPr>
         <p:spPr>
           <a:xfrm>
-            <a:off x="4169664" y="3520439"/>
+            <a:off x="3654987" y="3520439"/>
             <a:ext cx="274320" cy="365760"/>
           </a:xfrm>
           <a:prstGeom prst="rect">
@@ -3876,8 +3876,8 @@
         </p:nvSpPr>
         <p:spPr>
           <a:xfrm>
-            <a:off x="4389120" y="2834640"/>
-            <a:ext cx="1600200" cy="1737360"/>
+            <a:off x="3874443" y="2834640"/>
+            <a:ext cx="1342861" cy="1737360"/>
           </a:xfrm>
           <a:prstGeom prst="roundRect">
             <a:avLst>
@@ -3974,7 +3974,7 @@
                 </a:solidFill>
                 <a:latin typeface="Calibri"/>
               </a:rPr>
-              <a:t>Analyst edits in a table</a:t>
+              <a:t>Keep · edit · flag unclear</a:t>
             </a:r>
           </a:p>
         </p:txBody>
@@ -3987,7 +3987,7 @@
         </p:nvSpPr>
         <p:spPr>
           <a:xfrm>
-            <a:off x="5971032" y="3520439"/>
+            <a:off x="5199017" y="3520439"/>
             <a:ext cx="274320" cy="365760"/>
           </a:xfrm>
           <a:prstGeom prst="rect">
@@ -4030,8 +4030,8 @@
         </p:nvSpPr>
         <p:spPr>
           <a:xfrm>
-            <a:off x="6190488" y="2834640"/>
-            <a:ext cx="1600200" cy="1737360"/>
+            <a:off x="5418473" y="2834640"/>
+            <a:ext cx="1342861" cy="1737360"/>
           </a:xfrm>
           <a:prstGeom prst="roundRect">
             <a:avLst>
@@ -4141,7 +4141,7 @@
         </p:nvSpPr>
         <p:spPr>
           <a:xfrm>
-            <a:off x="7772399" y="3520439"/>
+            <a:off x="6743046" y="3520439"/>
             <a:ext cx="274320" cy="365760"/>
           </a:xfrm>
           <a:prstGeom prst="rect">
@@ -4184,8 +4184,8 @@
         </p:nvSpPr>
         <p:spPr>
           <a:xfrm>
-            <a:off x="7991856" y="2834640"/>
-            <a:ext cx="1600200" cy="1737360"/>
+            <a:off x="6962502" y="2834640"/>
+            <a:ext cx="1342861" cy="1737360"/>
           </a:xfrm>
           <a:prstGeom prst="roundRect">
             <a:avLst>
@@ -4295,7 +4295,7 @@
         </p:nvSpPr>
         <p:spPr>
           <a:xfrm>
-            <a:off x="9573767" y="3520439"/>
+            <a:off x="8287076" y="3520439"/>
             <a:ext cx="274320" cy="365760"/>
           </a:xfrm>
           <a:prstGeom prst="rect">
@@ -4338,8 +4338,8 @@
         </p:nvSpPr>
         <p:spPr>
           <a:xfrm>
-            <a:off x="9793224" y="2834640"/>
-            <a:ext cx="1600200" cy="1737360"/>
+            <a:off x="8506532" y="2834640"/>
+            <a:ext cx="1342861" cy="1737360"/>
           </a:xfrm>
           <a:prstGeom prst="roundRect">
             <a:avLst>
@@ -4444,6 +4444,160 @@
       <p:sp>
         <p:nvSpPr>
           <p:cNvPr id="17" name="TextBox 16"/>
+          <p:cNvSpPr txBox="1"/>
+          <p:nvPr/>
+        </p:nvSpPr>
+        <p:spPr>
+          <a:xfrm>
+            <a:off x="9831106" y="3520439"/>
+            <a:ext cx="274320" cy="365760"/>
+          </a:xfrm>
+          <a:prstGeom prst="rect">
+            <a:avLst/>
+          </a:prstGeom>
+          <a:noFill/>
+        </p:spPr>
+        <p:txBody>
+          <a:bodyPr wrap="square" anchor="t"/>
+          <a:lstStyle/>
+          <a:p>
+            <a:pPr algn="ctr">
+              <a:lnSpc>
+                <a:spcPct val="100000"/>
+              </a:lnSpc>
+              <a:spcBef>
+                <a:spcPts val="0"/>
+              </a:spcBef>
+              <a:spcAft>
+                <a:spcPts val="0"/>
+              </a:spcAft>
+            </a:pPr>
+            <a:r>
+              <a:rPr sz="2000" b="0" i="0">
+                <a:solidFill>
+                  <a:srgbClr val="C8CDDD"/>
+                </a:solidFill>
+                <a:latin typeface="Calibri"/>
+              </a:rPr>
+              <a:t>›</a:t>
+            </a:r>
+          </a:p>
+        </p:txBody>
+      </p:sp>
+      <p:sp>
+        <p:nvSpPr>
+          <p:cNvPr id="18" name="Rounded Rectangle 17"/>
+          <p:cNvSpPr/>
+          <p:nvPr/>
+        </p:nvSpPr>
+        <p:spPr>
+          <a:xfrm>
+            <a:off x="10050562" y="2834640"/>
+            <a:ext cx="1342861" cy="1737360"/>
+          </a:xfrm>
+          <a:prstGeom prst="roundRect">
+            <a:avLst>
+              <a:gd name="adj" fmla="val 10000"/>
+            </a:avLst>
+          </a:prstGeom>
+          <a:solidFill>
+            <a:srgbClr val="F7EFDC"/>
+          </a:solidFill>
+          <a:ln w="15875">
+            <a:solidFill>
+              <a:srgbClr val="B0872A"/>
+            </a:solidFill>
+          </a:ln>
+          <a:effectLst/>
+        </p:spPr>
+        <p:style>
+          <a:lnRef idx="1">
+            <a:schemeClr val="accent1"/>
+          </a:lnRef>
+          <a:fillRef idx="3">
+            <a:schemeClr val="accent1"/>
+          </a:fillRef>
+          <a:effectRef idx="2">
+            <a:schemeClr val="accent1"/>
+          </a:effectRef>
+          <a:fontRef idx="minor">
+            <a:schemeClr val="lt1"/>
+          </a:fontRef>
+        </p:style>
+        <p:txBody>
+          <a:bodyPr rtlCol="0" anchor="t" lIns="146304" rIns="146304" tIns="109728" bIns="109728" wrap="square"/>
+          <a:lstStyle/>
+          <a:p>
+            <a:pPr algn="l">
+              <a:lnSpc>
+                <a:spcPct val="100000"/>
+              </a:lnSpc>
+              <a:spcBef>
+                <a:spcPts val="0"/>
+              </a:spcBef>
+              <a:spcAft>
+                <a:spcPts val="0"/>
+              </a:spcAft>
+            </a:pPr>
+            <a:r>
+              <a:rPr sz="1200" b="1" i="0" spc="40">
+                <a:solidFill>
+                  <a:srgbClr val="9C7422"/>
+                </a:solidFill>
+                <a:latin typeface="Consolas"/>
+              </a:rPr>
+              <a:t>→</a:t>
+            </a:r>
+          </a:p>
+          <a:p>
+            <a:pPr algn="l">
+              <a:lnSpc>
+                <a:spcPct val="100000"/>
+              </a:lnSpc>
+              <a:spcBef>
+                <a:spcPts val="400"/>
+              </a:spcBef>
+              <a:spcAft>
+                <a:spcPts val="0"/>
+              </a:spcAft>
+            </a:pPr>
+            <a:r>
+              <a:rPr sz="1500" b="1" i="0">
+                <a:solidFill>
+                  <a:srgbClr val="9C7422"/>
+                </a:solidFill>
+                <a:latin typeface="Calibri"/>
+              </a:rPr>
+              <a:t>Allocation</a:t>
+            </a:r>
+          </a:p>
+          <a:p>
+            <a:pPr algn="l">
+              <a:lnSpc>
+                <a:spcPct val="105000"/>
+              </a:lnSpc>
+              <a:spcBef>
+                <a:spcPts val="300"/>
+              </a:spcBef>
+              <a:spcAft>
+                <a:spcPts val="0"/>
+              </a:spcAft>
+            </a:pPr>
+            <a:r>
+              <a:rPr sz="1100" b="0" i="0">
+                <a:solidFill>
+                  <a:srgbClr val="47517A"/>
+                </a:solidFill>
+                <a:latin typeface="Calibri"/>
+              </a:rPr>
+              <a:t>If weights → Apply</a:t>
+            </a:r>
+          </a:p>
+        </p:txBody>
+      </p:sp>
+      <p:sp>
+        <p:nvSpPr>
+          <p:cNvPr id="19" name="TextBox 18"/>
           <p:cNvSpPr txBox="1"/>
           <p:nvPr/>
         </p:nvSpPr>
@@ -5693,6 +5847,73 @@
                 <a:latin typeface="Consolas"/>
               </a:rPr>
               <a:t>Open question · "impact of rate hikes?"</a:t>
+            </a:r>
+          </a:p>
+        </p:txBody>
+      </p:sp>
+      <p:sp>
+        <p:nvSpPr>
+          <p:cNvPr id="9" name="Rounded Rectangle 8"/>
+          <p:cNvSpPr/>
+          <p:nvPr/>
+        </p:nvSpPr>
+        <p:spPr>
+          <a:xfrm>
+            <a:off x="786384" y="5577840"/>
+            <a:ext cx="10607040" cy="685800"/>
+          </a:xfrm>
+          <a:prstGeom prst="roundRect">
+            <a:avLst>
+              <a:gd name="adj" fmla="val 6000"/>
+            </a:avLst>
+          </a:prstGeom>
+          <a:solidFill>
+            <a:srgbClr val="EEF0F6"/>
+          </a:solidFill>
+          <a:ln w="12700">
+            <a:solidFill>
+              <a:srgbClr val="DFE2EE"/>
+            </a:solidFill>
+          </a:ln>
+          <a:effectLst/>
+        </p:spPr>
+        <p:style>
+          <a:lnRef idx="1">
+            <a:schemeClr val="accent1"/>
+          </a:lnRef>
+          <a:fillRef idx="3">
+            <a:schemeClr val="accent1"/>
+          </a:fillRef>
+          <a:effectRef idx="2">
+            <a:schemeClr val="accent1"/>
+          </a:effectRef>
+          <a:fontRef idx="minor">
+            <a:schemeClr val="lt1"/>
+          </a:fontRef>
+        </p:style>
+        <p:txBody>
+          <a:bodyPr rtlCol="0" anchor="ctr" lIns="146304" rIns="146304" tIns="109728" bIns="109728" wrap="square"/>
+          <a:lstStyle/>
+          <a:p>
+            <a:pPr algn="l">
+              <a:lnSpc>
+                <a:spcPct val="112000"/>
+              </a:lnSpc>
+              <a:spcBef>
+                <a:spcPts val="0"/>
+              </a:spcBef>
+              <a:spcAft>
+                <a:spcPts val="0"/>
+              </a:spcAft>
+            </a:pPr>
+            <a:r>
+              <a:rPr sz="1200" b="0" i="0">
+                <a:solidFill>
+                  <a:srgbClr val="47517A"/>
+                </a:solidFill>
+                <a:latin typeface="Calibri"/>
+              </a:rPr>
+              <a:t>⚠️  Anything ambiguous is typed needs-clarification and held out of the proposal until resolved. If the client stated target weights, Confirm surfaces a Proposed allocation to Apply.</a:t>
             </a:r>
           </a:p>
         </p:txBody>

--- a/Tactical_Workflow.pptx
+++ b/Tactical_Workflow.pptx
@@ -3357,7 +3357,7 @@
                 </a:solidFill>
                 <a:latin typeface="Calibri"/>
               </a:rPr>
-              <a:t>Meridian Family Office Copilot   ·   v7 · Tactical instructions   ·   For partner &amp; client discussion</a:t>
+              <a:t>Meridian Family Office Copilot   ·   v8 · Tactical instructions   ·   For partner &amp; client discussion</a:t>
             </a:r>
           </a:p>
         </p:txBody>
@@ -6687,7 +6687,7 @@
                 </a:solidFill>
                 <a:latin typeface="Calibri"/>
               </a:rPr>
-              <a:t>STEP 4 · THE GUARDRAIL</a:t>
+              <a:t>STEP 4 · THE GUARDRAIL (V8: TIERED)</a:t>
             </a:r>
           </a:p>
         </p:txBody>
@@ -6730,7 +6730,7 @@
                 </a:solidFill>
                 <a:latin typeface="Georgia"/>
               </a:rPr>
-              <a:t>Guidance shapes the story — never the numbers</a:t>
+              <a:t>Guidance can gate a number — never invent one</a:t>
             </a:r>
           </a:p>
         </p:txBody>
@@ -6797,7 +6797,7 @@
                 </a:solidFill>
                 <a:latin typeface="Calibri"/>
               </a:rPr>
-              <a:t>GUIDANCE CAN SHAPE</a:t>
+              <a:t>GUIDANCE CAN SHAPE &amp; GATE</a:t>
             </a:r>
           </a:p>
           <a:p>
@@ -6813,13 +6813,13 @@
               </a:spcAft>
             </a:pPr>
             <a:r>
-              <a:rPr sz="1300" b="0" i="0">
+              <a:rPr sz="1250" b="0" i="0">
                 <a:solidFill>
                   <a:srgbClr val="47517A"/>
                 </a:solidFill>
                 <a:latin typeface="Calibri"/>
               </a:rPr>
-              <a:t>•  The monitoring watchlist</a:t>
+              <a:t>•  The monitoring watchlist &amp; the commentary</a:t>
             </a:r>
           </a:p>
           <a:p>
@@ -6835,13 +6835,13 @@
               </a:spcAft>
             </a:pPr>
             <a:r>
-              <a:rPr sz="1300" b="0" i="0">
+              <a:rPr sz="1250" b="0" i="0">
                 <a:solidFill>
                   <a:srgbClr val="47517A"/>
                 </a:solidFill>
                 <a:latin typeface="Calibri"/>
               </a:rPr>
-              <a:t>•  The written commentary &amp; emphasis</a:t>
+              <a:t>•  🔒 Enforced trigger gates a rebalance buy (→ hold) vs a sourced live price</a:t>
             </a:r>
           </a:p>
           <a:p>
@@ -6857,7 +6857,7 @@
               </a:spcAft>
             </a:pPr>
             <a:r>
-              <a:rPr sz="1300" b="0" i="0">
+              <a:rPr sz="1250" b="0" i="0">
                 <a:solidFill>
                   <a:srgbClr val="47517A"/>
                 </a:solidFill>
@@ -6930,7 +6930,7 @@
                 </a:solidFill>
                 <a:latin typeface="Calibri"/>
               </a:rPr>
-              <a:t>GUIDANCE NEVER CHANGES</a:t>
+              <a:t>GUIDANCE NEVER INVENTS</a:t>
             </a:r>
           </a:p>
           <a:p>
@@ -6946,13 +6946,13 @@
               </a:spcAft>
             </a:pPr>
             <a:r>
-              <a:rPr sz="1300" b="0" i="0">
+              <a:rPr sz="1250" b="0" i="0">
                 <a:solidFill>
                   <a:srgbClr val="47517A"/>
                 </a:solidFill>
                 <a:latin typeface="Calibri"/>
               </a:rPr>
-              <a:t>•  Allocation, drift &amp; rebalancing figures</a:t>
+              <a:t>•  A figure from thin air — enforced checks use a price with provenance</a:t>
             </a:r>
           </a:p>
           <a:p>
@@ -6968,13 +6968,13 @@
               </a:spcAft>
             </a:pPr>
             <a:r>
-              <a:rPr sz="1300" b="0" i="0">
+              <a:rPr sz="1250" b="0" i="0">
                 <a:solidFill>
                   <a:srgbClr val="47517A"/>
                 </a:solidFill>
                 <a:latin typeface="Calibri"/>
               </a:rPr>
-              <a:t>•  Suitability checks</a:t>
+              <a:t>•  Suitability thresholds</a:t>
             </a:r>
           </a:p>
           <a:p>
@@ -6990,13 +6990,13 @@
               </a:spcAft>
             </a:pPr>
             <a:r>
-              <a:rPr sz="1300" b="0" i="0">
+              <a:rPr sz="1250" b="0" i="0">
                 <a:solidFill>
                   <a:srgbClr val="47517A"/>
                 </a:solidFill>
                 <a:latin typeface="Calibri"/>
               </a:rPr>
-              <a:t>•  Any dollar amount — all from real holdings</a:t>
+              <a:t>•  Holdings — every dollar from the real book</a:t>
             </a:r>
           </a:p>
         </p:txBody>
@@ -7033,13 +7033,13 @@
               </a:spcAft>
             </a:pPr>
             <a:r>
-              <a:rPr sz="1900" b="1" i="1">
+              <a:rPr sz="1800" b="1" i="1">
                 <a:solidFill>
                   <a:srgbClr val="1E2A56"/>
                 </a:solidFill>
                 <a:latin typeface="Georgia"/>
               </a:rPr>
-              <a:t>Ad-hoc words become things the copilot can act on and monitor — without ever letting the model invent a number.</a:t>
+              <a:t>Each item is tiered 🔒 enforced / 📡 monitored / 📝 advisory. A client's condition can gate or flag a trade — never fabricate one.</a:t>
             </a:r>
           </a:p>
         </p:txBody>

--- a/Tactical_Workflow.pptx
+++ b/Tactical_Workflow.pptx
@@ -3285,7 +3285,7 @@
         <p:spPr>
           <a:xfrm>
             <a:off x="822960" y="4297680"/>
-            <a:ext cx="8778240" cy="914400"/>
+            <a:ext cx="8961120" cy="914400"/>
           </a:xfrm>
           <a:prstGeom prst="rect">
             <a:avLst/>
@@ -3314,7 +3314,7 @@
                 </a:solidFill>
                 <a:latin typeface="Calibri"/>
               </a:rPr>
-              <a:t>What the copilot does the moment you confirm the sorted items — and the one rule that keeps every number trustworthy.</a:t>
+              <a:t>How the copilot turns the client's instructions and documents into a proposal — and the one rule that keeps every number trustworthy.</a:t>
             </a:r>
           </a:p>
         </p:txBody>
@@ -3357,7 +3357,7 @@
                 </a:solidFill>
                 <a:latin typeface="Calibri"/>
               </a:rPr>
-              <a:t>Meridian Family Office Copilot   ·   v8 · Tactical instructions   ·   For partner &amp; client discussion</a:t>
+              <a:t>Meridian Family Office Copilot   ·   v10 · Tactical instructions   ·   For partner &amp; client discussion</a:t>
             </a:r>
           </a:p>
         </p:txBody>
@@ -3512,7 +3512,7 @@
                 </a:solidFill>
                 <a:latin typeface="Georgia"/>
               </a:rPr>
-              <a:t>Four steps in, three outputs out</a:t>
+              <a:t>Three steps in, one prompt, one proposal</a:t>
             </a:r>
           </a:p>
         </p:txBody>
@@ -3555,7 +3555,7 @@
                 </a:solidFill>
                 <a:latin typeface="Calibri"/>
               </a:rPr>
-              <a:t>The first four steps are what the analyst does. Confirm is where this walkthrough begins — everything to its right is automatic.</a:t>
+              <a:t>The first three steps are what the analyst does. Everything to their right is automatic — and fully visible in the prompt.</a:t>
             </a:r>
           </a:p>
         </p:txBody>
@@ -3569,7 +3569,7 @@
         <p:spPr>
           <a:xfrm>
             <a:off x="786384" y="2834640"/>
-            <a:ext cx="1342861" cy="1737360"/>
+            <a:ext cx="1584960" cy="1737360"/>
           </a:xfrm>
           <a:prstGeom prst="roundRect">
             <a:avLst>
@@ -3666,7 +3666,7 @@
                 </a:solidFill>
                 <a:latin typeface="Calibri"/>
               </a:rPr>
-              <a:t>Client's asks, plain language</a:t>
+              <a:t>Tactical text + documents</a:t>
             </a:r>
           </a:p>
         </p:txBody>
@@ -3679,7 +3679,7 @@
         </p:nvSpPr>
         <p:spPr>
           <a:xfrm>
-            <a:off x="2110957" y="3520439"/>
+            <a:off x="2362200" y="3520439"/>
             <a:ext cx="274320" cy="365760"/>
           </a:xfrm>
           <a:prstGeom prst="rect">
@@ -3722,8 +3722,8 @@
         </p:nvSpPr>
         <p:spPr>
           <a:xfrm>
-            <a:off x="2330413" y="2834640"/>
-            <a:ext cx="1342861" cy="1737360"/>
+            <a:off x="2590800" y="2834640"/>
+            <a:ext cx="1584960" cy="1737360"/>
           </a:xfrm>
           <a:prstGeom prst="roundRect">
             <a:avLst>
@@ -3798,7 +3798,7 @@
                 </a:solidFill>
                 <a:latin typeface="Calibri"/>
               </a:rPr>
-              <a:t>Sort</a:t>
+              <a:t>Set policy</a:t>
             </a:r>
           </a:p>
           <a:p>
@@ -3820,7 +3820,7 @@
                 </a:solidFill>
                 <a:latin typeface="Calibri"/>
               </a:rPr>
-              <a:t>Copilot types each ask</a:t>
+              <a:t>Mandate · risk · limits</a:t>
             </a:r>
           </a:p>
         </p:txBody>
@@ -3833,7 +3833,7 @@
         </p:nvSpPr>
         <p:spPr>
           <a:xfrm>
-            <a:off x="3654987" y="3520439"/>
+            <a:off x="4166616" y="3520439"/>
             <a:ext cx="274320" cy="365760"/>
           </a:xfrm>
           <a:prstGeom prst="rect">
@@ -3876,8 +3876,8 @@
         </p:nvSpPr>
         <p:spPr>
           <a:xfrm>
-            <a:off x="3874443" y="2834640"/>
-            <a:ext cx="1342861" cy="1737360"/>
+            <a:off x="4395216" y="2834640"/>
+            <a:ext cx="1584960" cy="1737360"/>
           </a:xfrm>
           <a:prstGeom prst="roundRect">
             <a:avLst>
@@ -3952,7 +3952,7 @@
                 </a:solidFill>
                 <a:latin typeface="Calibri"/>
               </a:rPr>
-              <a:t>Review</a:t>
+              <a:t>Analyse</a:t>
             </a:r>
           </a:p>
           <a:p>
@@ -3974,7 +3974,7 @@
                 </a:solidFill>
                 <a:latin typeface="Calibri"/>
               </a:rPr>
-              <a:t>Keep · edit · flag unclear</a:t>
+              <a:t>Engine computes FACTS</a:t>
             </a:r>
           </a:p>
         </p:txBody>
@@ -3987,7 +3987,7 @@
         </p:nvSpPr>
         <p:spPr>
           <a:xfrm>
-            <a:off x="5199017" y="3520439"/>
+            <a:off x="5971032" y="3520439"/>
             <a:ext cx="274320" cy="365760"/>
           </a:xfrm>
           <a:prstGeom prst="rect">
@@ -4030,8 +4030,8 @@
         </p:nvSpPr>
         <p:spPr>
           <a:xfrm>
-            <a:off x="5418473" y="2834640"/>
-            <a:ext cx="1342861" cy="1737360"/>
+            <a:off x="6199632" y="2834640"/>
+            <a:ext cx="1584960" cy="1737360"/>
           </a:xfrm>
           <a:prstGeom prst="roundRect">
             <a:avLst>
@@ -4039,11 +4039,11 @@
             </a:avLst>
           </a:prstGeom>
           <a:solidFill>
-            <a:srgbClr val="E6F1EB"/>
+            <a:srgbClr val="F7EFDC"/>
           </a:solidFill>
           <a:ln w="15875">
             <a:solidFill>
-              <a:srgbClr val="2F6F57"/>
+              <a:srgbClr val="B0872A"/>
             </a:solidFill>
           </a:ln>
           <a:effectLst/>
@@ -4080,11 +4080,11 @@
             <a:r>
               <a:rPr sz="1200" b="1" i="0" spc="40">
                 <a:solidFill>
-                  <a:srgbClr val="2F6F57"/>
+                  <a:srgbClr val="9C7422"/>
                 </a:solidFill>
                 <a:latin typeface="Consolas"/>
               </a:rPr>
-              <a:t>04</a:t>
+              <a:t>→</a:t>
             </a:r>
           </a:p>
           <a:p>
@@ -4102,11 +4102,11 @@
             <a:r>
               <a:rPr sz="1500" b="1" i="0">
                 <a:solidFill>
-                  <a:srgbClr val="2F6F57"/>
+                  <a:srgbClr val="9C7422"/>
                 </a:solidFill>
                 <a:latin typeface="Calibri"/>
               </a:rPr>
-              <a:t>✓ Confirm</a:t>
+              <a:t>Prompt</a:t>
             </a:r>
           </a:p>
           <a:p>
@@ -4128,7 +4128,7 @@
                 </a:solidFill>
                 <a:latin typeface="Calibri"/>
               </a:rPr>
-              <a:t>You are here</a:t>
+              <a:t>One self-contained brief</a:t>
             </a:r>
           </a:p>
         </p:txBody>
@@ -4141,7 +4141,7 @@
         </p:nvSpPr>
         <p:spPr>
           <a:xfrm>
-            <a:off x="6743046" y="3520439"/>
+            <a:off x="7775447" y="3520439"/>
             <a:ext cx="274320" cy="365760"/>
           </a:xfrm>
           <a:prstGeom prst="rect">
@@ -4184,8 +4184,8 @@
         </p:nvSpPr>
         <p:spPr>
           <a:xfrm>
-            <a:off x="6962502" y="2834640"/>
-            <a:ext cx="1342861" cy="1737360"/>
+            <a:off x="8004048" y="2834640"/>
+            <a:ext cx="1584960" cy="1737360"/>
           </a:xfrm>
           <a:prstGeom prst="roundRect">
             <a:avLst>
@@ -4260,7 +4260,7 @@
                 </a:solidFill>
                 <a:latin typeface="Calibri"/>
               </a:rPr>
-              <a:t>Watchlist</a:t>
+              <a:t>AI Model</a:t>
             </a:r>
           </a:p>
           <a:p>
@@ -4282,7 +4282,7 @@
                 </a:solidFill>
                 <a:latin typeface="Calibri"/>
               </a:rPr>
-              <a:t>Levels to monitor</a:t>
+              <a:t>Writes the narrative</a:t>
             </a:r>
           </a:p>
         </p:txBody>
@@ -4295,7 +4295,7 @@
         </p:nvSpPr>
         <p:spPr>
           <a:xfrm>
-            <a:off x="8287076" y="3520439"/>
+            <a:off x="9579864" y="3520439"/>
             <a:ext cx="274320" cy="365760"/>
           </a:xfrm>
           <a:prstGeom prst="rect">
@@ -4338,8 +4338,8 @@
         </p:nvSpPr>
         <p:spPr>
           <a:xfrm>
-            <a:off x="8506532" y="2834640"/>
-            <a:ext cx="1342861" cy="1737360"/>
+            <a:off x="9808464" y="2834640"/>
+            <a:ext cx="1584960" cy="1737360"/>
           </a:xfrm>
           <a:prstGeom prst="roundRect">
             <a:avLst>
@@ -4414,7 +4414,7 @@
                 </a:solidFill>
                 <a:latin typeface="Calibri"/>
               </a:rPr>
-              <a:t>Guidance</a:t>
+              <a:t>Deck</a:t>
             </a:r>
           </a:p>
           <a:p>
@@ -4436,7 +4436,7 @@
                 </a:solidFill>
                 <a:latin typeface="Calibri"/>
               </a:rPr>
-              <a:t>Shapes the proposal</a:t>
+              <a:t>PPTX / PDF</a:t>
             </a:r>
           </a:p>
         </p:txBody>
@@ -4449,8 +4449,8 @@
         </p:nvSpPr>
         <p:spPr>
           <a:xfrm>
-            <a:off x="9831106" y="3520439"/>
-            <a:ext cx="274320" cy="365760"/>
+            <a:off x="786384" y="4892040"/>
+            <a:ext cx="10058400" cy="457200"/>
           </a:xfrm>
           <a:prstGeom prst="rect">
             <a:avLst/>
@@ -4461,7 +4461,7 @@
           <a:bodyPr wrap="square" anchor="t"/>
           <a:lstStyle/>
           <a:p>
-            <a:pPr algn="ctr">
+            <a:pPr algn="l">
               <a:lnSpc>
                 <a:spcPct val="100000"/>
               </a:lnSpc>
@@ -4473,167 +4473,13 @@
               </a:spcAft>
             </a:pPr>
             <a:r>
-              <a:rPr sz="2000" b="0" i="0">
-                <a:solidFill>
-                  <a:srgbClr val="C8CDDD"/>
+              <a:rPr sz="1300" b="1" i="0">
+                <a:solidFill>
+                  <a:srgbClr val="47517A"/>
                 </a:solidFill>
                 <a:latin typeface="Calibri"/>
               </a:rPr>
-              <a:t>›</a:t>
-            </a:r>
-          </a:p>
-        </p:txBody>
-      </p:sp>
-      <p:sp>
-        <p:nvSpPr>
-          <p:cNvPr id="18" name="Rounded Rectangle 17"/>
-          <p:cNvSpPr/>
-          <p:nvPr/>
-        </p:nvSpPr>
-        <p:spPr>
-          <a:xfrm>
-            <a:off x="10050562" y="2834640"/>
-            <a:ext cx="1342861" cy="1737360"/>
-          </a:xfrm>
-          <a:prstGeom prst="roundRect">
-            <a:avLst>
-              <a:gd name="adj" fmla="val 10000"/>
-            </a:avLst>
-          </a:prstGeom>
-          <a:solidFill>
-            <a:srgbClr val="F7EFDC"/>
-          </a:solidFill>
-          <a:ln w="15875">
-            <a:solidFill>
-              <a:srgbClr val="B0872A"/>
-            </a:solidFill>
-          </a:ln>
-          <a:effectLst/>
-        </p:spPr>
-        <p:style>
-          <a:lnRef idx="1">
-            <a:schemeClr val="accent1"/>
-          </a:lnRef>
-          <a:fillRef idx="3">
-            <a:schemeClr val="accent1"/>
-          </a:fillRef>
-          <a:effectRef idx="2">
-            <a:schemeClr val="accent1"/>
-          </a:effectRef>
-          <a:fontRef idx="minor">
-            <a:schemeClr val="lt1"/>
-          </a:fontRef>
-        </p:style>
-        <p:txBody>
-          <a:bodyPr rtlCol="0" anchor="t" lIns="146304" rIns="146304" tIns="109728" bIns="109728" wrap="square"/>
-          <a:lstStyle/>
-          <a:p>
-            <a:pPr algn="l">
-              <a:lnSpc>
-                <a:spcPct val="100000"/>
-              </a:lnSpc>
-              <a:spcBef>
-                <a:spcPts val="0"/>
-              </a:spcBef>
-              <a:spcAft>
-                <a:spcPts val="0"/>
-              </a:spcAft>
-            </a:pPr>
-            <a:r>
-              <a:rPr sz="1200" b="1" i="0" spc="40">
-                <a:solidFill>
-                  <a:srgbClr val="9C7422"/>
-                </a:solidFill>
-                <a:latin typeface="Consolas"/>
-              </a:rPr>
-              <a:t>→</a:t>
-            </a:r>
-          </a:p>
-          <a:p>
-            <a:pPr algn="l">
-              <a:lnSpc>
-                <a:spcPct val="100000"/>
-              </a:lnSpc>
-              <a:spcBef>
-                <a:spcPts val="400"/>
-              </a:spcBef>
-              <a:spcAft>
-                <a:spcPts val="0"/>
-              </a:spcAft>
-            </a:pPr>
-            <a:r>
-              <a:rPr sz="1500" b="1" i="0">
-                <a:solidFill>
-                  <a:srgbClr val="9C7422"/>
-                </a:solidFill>
-                <a:latin typeface="Calibri"/>
-              </a:rPr>
-              <a:t>Allocation</a:t>
-            </a:r>
-          </a:p>
-          <a:p>
-            <a:pPr algn="l">
-              <a:lnSpc>
-                <a:spcPct val="105000"/>
-              </a:lnSpc>
-              <a:spcBef>
-                <a:spcPts val="300"/>
-              </a:spcBef>
-              <a:spcAft>
-                <a:spcPts val="0"/>
-              </a:spcAft>
-            </a:pPr>
-            <a:r>
-              <a:rPr sz="1100" b="0" i="0">
-                <a:solidFill>
-                  <a:srgbClr val="47517A"/>
-                </a:solidFill>
-                <a:latin typeface="Calibri"/>
-              </a:rPr>
-              <a:t>If weights → Apply</a:t>
-            </a:r>
-          </a:p>
-        </p:txBody>
-      </p:sp>
-      <p:sp>
-        <p:nvSpPr>
-          <p:cNvPr id="19" name="TextBox 18"/>
-          <p:cNvSpPr txBox="1"/>
-          <p:nvPr/>
-        </p:nvSpPr>
-        <p:spPr>
-          <a:xfrm>
-            <a:off x="786384" y="4892040"/>
-            <a:ext cx="10058400" cy="457200"/>
-          </a:xfrm>
-          <a:prstGeom prst="rect">
-            <a:avLst/>
-          </a:prstGeom>
-          <a:noFill/>
-        </p:spPr>
-        <p:txBody>
-          <a:bodyPr wrap="square" anchor="t"/>
-          <a:lstStyle/>
-          <a:p>
-            <a:pPr algn="l">
-              <a:lnSpc>
-                <a:spcPct val="100000"/>
-              </a:lnSpc>
-              <a:spcBef>
-                <a:spcPts val="0"/>
-              </a:spcBef>
-              <a:spcAft>
-                <a:spcPts val="0"/>
-              </a:spcAft>
-            </a:pPr>
-            <a:r>
-              <a:rPr sz="1300" b="1" i="0">
-                <a:solidFill>
-                  <a:srgbClr val="47517A"/>
-                </a:solidFill>
-                <a:latin typeface="Calibri"/>
-              </a:rPr>
-              <a:t>The rest of this deck follows what leaves the Confirm step.</a:t>
+              <a:t>The rest of this deck follows what the copilot assembles and what the AI Model does with it.</a:t>
             </a:r>
           </a:p>
         </p:txBody>
@@ -4745,7 +4591,7 @@
                 </a:solidFill>
                 <a:latin typeface="Calibri"/>
               </a:rPr>
-              <a:t>STEP 1 · AFTER CONFIRM</a:t>
+              <a:t>STEP 1 · ASSEMBLE</a:t>
             </a:r>
           </a:p>
         </p:txBody>
@@ -4788,7 +4634,7 @@
                 </a:solidFill>
                 <a:latin typeface="Georgia"/>
               </a:rPr>
-              <a:t>Each ask is now a structured record</a:t>
+              <a:t>One self-contained prompt — everything in one place</a:t>
             </a:r>
           </a:p>
         </p:txBody>
@@ -4831,7 +4677,7 @@
                 </a:solidFill>
                 <a:latin typeface="Calibri"/>
               </a:rPr>
-              <a:t>A sentence becomes fields the system can act on. Every level is copied from the client's own words — never invented.</a:t>
+              <a:t>The copilot assembles a single prompt: the deterministic FACTS plus the raw context. Numbers come only from FACTS; the rest is intent and context.</a:t>
             </a:r>
           </a:p>
         </p:txBody>
@@ -4845,19 +4691,19 @@
         <p:spPr>
           <a:xfrm>
             <a:off x="786384" y="2743200"/>
-            <a:ext cx="10607040" cy="1600200"/>
+            <a:ext cx="3450336" cy="1078992"/>
           </a:xfrm>
           <a:prstGeom prst="roundRect">
             <a:avLst>
-              <a:gd name="adj" fmla="val 6000"/>
+              <a:gd name="adj" fmla="val 8000"/>
             </a:avLst>
           </a:prstGeom>
           <a:solidFill>
-            <a:srgbClr val="F7EFDC"/>
+            <a:srgbClr val="EEF0F6"/>
           </a:solidFill>
-          <a:ln w="19050">
+          <a:ln w="12700">
             <a:solidFill>
-              <a:srgbClr val="B0872A"/>
+              <a:srgbClr val="DFE2EE"/>
             </a:solidFill>
           </a:ln>
           <a:effectLst/>
@@ -4877,10 +4723,51 @@
           </a:fontRef>
         </p:style>
         <p:txBody>
-          <a:bodyPr rtlCol="0" anchor="t" lIns="146304" rIns="146304" tIns="109728" bIns="109728" wrap="square"/>
-          <a:lstStyle/>
-          <a:p>
-            <a:pPr algn="ctr"/>
+          <a:bodyPr rtlCol="0" anchor="ctr" lIns="146304" rIns="146304" tIns="109728" bIns="109728" wrap="square"/>
+          <a:lstStyle/>
+          <a:p>
+            <a:pPr algn="l">
+              <a:lnSpc>
+                <a:spcPct val="100000"/>
+              </a:lnSpc>
+              <a:spcBef>
+                <a:spcPts val="0"/>
+              </a:spcBef>
+              <a:spcAft>
+                <a:spcPts val="0"/>
+              </a:spcAft>
+            </a:pPr>
+            <a:r>
+              <a:rPr sz="1150" b="1" i="0" spc="40">
+                <a:solidFill>
+                  <a:srgbClr val="16203C"/>
+                </a:solidFill>
+                <a:latin typeface="Calibri"/>
+              </a:rPr>
+              <a:t>ROLE + GROUNDING RULES</a:t>
+            </a:r>
+          </a:p>
+          <a:p>
+            <a:pPr algn="l">
+              <a:lnSpc>
+                <a:spcPct val="105000"/>
+              </a:lnSpc>
+              <a:spcBef>
+                <a:spcPts val="600"/>
+              </a:spcBef>
+              <a:spcAft>
+                <a:spcPts val="0"/>
+              </a:spcAft>
+            </a:pPr>
+            <a:r>
+              <a:rPr sz="1150" b="0" i="0">
+                <a:solidFill>
+                  <a:srgbClr val="47517A"/>
+                </a:solidFill>
+                <a:latin typeface="Calibri"/>
+              </a:rPr>
+              <a:t>analyst persona · FACTS-only</a:t>
+            </a:r>
           </a:p>
         </p:txBody>
       </p:sp>
@@ -4892,16 +4779,16 @@
         </p:nvSpPr>
         <p:spPr>
           <a:xfrm>
-            <a:off x="868680" y="2889504"/>
-            <a:ext cx="2514600" cy="1307592"/>
+            <a:off x="4364736" y="2743200"/>
+            <a:ext cx="3450336" cy="1078992"/>
           </a:xfrm>
           <a:prstGeom prst="roundRect">
             <a:avLst>
-              <a:gd name="adj" fmla="val 9000"/>
+              <a:gd name="adj" fmla="val 8000"/>
             </a:avLst>
           </a:prstGeom>
           <a:solidFill>
-            <a:srgbClr val="FFFFFF"/>
+            <a:srgbClr val="EEF0F6"/>
           </a:solidFill>
           <a:ln w="12700">
             <a:solidFill>
@@ -4925,7 +4812,7 @@
           </a:fontRef>
         </p:style>
         <p:txBody>
-          <a:bodyPr rtlCol="0" anchor="t" lIns="146304" rIns="146304" tIns="109728" bIns="109728" wrap="square"/>
+          <a:bodyPr rtlCol="0" anchor="ctr" lIns="146304" rIns="146304" tIns="109728" bIns="109728" wrap="square"/>
           <a:lstStyle/>
           <a:p>
             <a:pPr algn="l">
@@ -4940,13 +4827,13 @@
               </a:spcAft>
             </a:pPr>
             <a:r>
-              <a:rPr sz="1000" b="1" i="0" spc="80">
-                <a:solidFill>
-                  <a:srgbClr val="838CAD"/>
+              <a:rPr sz="1150" b="1" i="0" spc="40">
+                <a:solidFill>
+                  <a:srgbClr val="16203C"/>
                 </a:solidFill>
                 <a:latin typeface="Calibri"/>
               </a:rPr>
-              <a:t>TYPE</a:t>
+              <a:t>INTAKE PARAMETERS</a:t>
             </a:r>
           </a:p>
           <a:p>
@@ -4955,20 +4842,20 @@
                 <a:spcPct val="105000"/>
               </a:lnSpc>
               <a:spcBef>
-                <a:spcPts val="800"/>
-              </a:spcBef>
-              <a:spcAft>
-                <a:spcPts val="0"/>
-              </a:spcAft>
-            </a:pPr>
-            <a:r>
-              <a:rPr sz="1500" b="1" i="0">
-                <a:solidFill>
-                  <a:srgbClr val="9C7422"/>
-                </a:solidFill>
-                <a:latin typeface="Consolas"/>
-              </a:rPr>
-              <a:t>entry_trigger</a:t>
+                <a:spcPts val="600"/>
+              </a:spcBef>
+              <a:spcAft>
+                <a:spcPts val="0"/>
+              </a:spcAft>
+            </a:pPr>
+            <a:r>
+              <a:rPr sz="1150" b="0" i="0">
+                <a:solidFill>
+                  <a:srgbClr val="47517A"/>
+                </a:solidFill>
+                <a:latin typeface="Calibri"/>
+              </a:rPr>
+              <a:t>mandate · risk · limits · targets</a:t>
             </a:r>
           </a:p>
         </p:txBody>
@@ -4981,20 +4868,20 @@
         </p:nvSpPr>
         <p:spPr>
           <a:xfrm>
-            <a:off x="3511296" y="2889504"/>
-            <a:ext cx="2514600" cy="1307592"/>
+            <a:off x="7943088" y="2743200"/>
+            <a:ext cx="3450336" cy="1078992"/>
           </a:xfrm>
           <a:prstGeom prst="roundRect">
             <a:avLst>
-              <a:gd name="adj" fmla="val 9000"/>
+              <a:gd name="adj" fmla="val 8000"/>
             </a:avLst>
           </a:prstGeom>
           <a:solidFill>
-            <a:srgbClr val="FFFFFF"/>
+            <a:srgbClr val="F7EFDC"/>
           </a:solidFill>
-          <a:ln w="12700">
+          <a:ln w="19050">
             <a:solidFill>
-              <a:srgbClr val="DFE2EE"/>
+              <a:srgbClr val="B0872A"/>
             </a:solidFill>
           </a:ln>
           <a:effectLst/>
@@ -5014,7 +4901,7 @@
           </a:fontRef>
         </p:style>
         <p:txBody>
-          <a:bodyPr rtlCol="0" anchor="t" lIns="146304" rIns="146304" tIns="109728" bIns="109728" wrap="square"/>
+          <a:bodyPr rtlCol="0" anchor="ctr" lIns="146304" rIns="146304" tIns="109728" bIns="109728" wrap="square"/>
           <a:lstStyle/>
           <a:p>
             <a:pPr algn="l">
@@ -5029,13 +4916,13 @@
               </a:spcAft>
             </a:pPr>
             <a:r>
-              <a:rPr sz="1000" b="1" i="0" spc="80">
-                <a:solidFill>
-                  <a:srgbClr val="838CAD"/>
+              <a:rPr sz="1150" b="1" i="0" spc="40">
+                <a:solidFill>
+                  <a:srgbClr val="9C7422"/>
                 </a:solidFill>
                 <a:latin typeface="Calibri"/>
               </a:rPr>
-              <a:t>INSTRUMENT</a:t>
+              <a:t>FACTS (JSON)</a:t>
             </a:r>
           </a:p>
           <a:p>
@@ -5044,20 +4931,20 @@
                 <a:spcPct val="105000"/>
               </a:lnSpc>
               <a:spcBef>
-                <a:spcPts val="800"/>
-              </a:spcBef>
-              <a:spcAft>
-                <a:spcPts val="0"/>
-              </a:spcAft>
-            </a:pPr>
-            <a:r>
-              <a:rPr sz="1500" b="1" i="0">
-                <a:solidFill>
-                  <a:srgbClr val="16203C"/>
-                </a:solidFill>
-                <a:latin typeface="Consolas"/>
-              </a:rPr>
-              <a:t>Gold ETF</a:t>
+                <a:spcPts val="600"/>
+              </a:spcBef>
+              <a:spcAft>
+                <a:spcPts val="0"/>
+              </a:spcAft>
+            </a:pPr>
+            <a:r>
+              <a:rPr sz="1150" b="0" i="0">
+                <a:solidFill>
+                  <a:srgbClr val="47517A"/>
+                </a:solidFill>
+                <a:latin typeface="Calibri"/>
+              </a:rPr>
+              <a:t>the only source of numbers</a:t>
             </a:r>
           </a:p>
         </p:txBody>
@@ -5070,16 +4957,16 @@
         </p:nvSpPr>
         <p:spPr>
           <a:xfrm>
-            <a:off x="6153912" y="2889504"/>
-            <a:ext cx="2514600" cy="1307592"/>
+            <a:off x="786384" y="4005072"/>
+            <a:ext cx="3450336" cy="1078992"/>
           </a:xfrm>
           <a:prstGeom prst="roundRect">
             <a:avLst>
-              <a:gd name="adj" fmla="val 9000"/>
+              <a:gd name="adj" fmla="val 8000"/>
             </a:avLst>
           </a:prstGeom>
           <a:solidFill>
-            <a:srgbClr val="FFFFFF"/>
+            <a:srgbClr val="EEF0F6"/>
           </a:solidFill>
           <a:ln w="12700">
             <a:solidFill>
@@ -5103,7 +4990,7 @@
           </a:fontRef>
         </p:style>
         <p:txBody>
-          <a:bodyPr rtlCol="0" anchor="t" lIns="146304" rIns="146304" tIns="109728" bIns="109728" wrap="square"/>
+          <a:bodyPr rtlCol="0" anchor="ctr" lIns="146304" rIns="146304" tIns="109728" bIns="109728" wrap="square"/>
           <a:lstStyle/>
           <a:p>
             <a:pPr algn="l">
@@ -5118,13 +5005,13 @@
               </a:spcAft>
             </a:pPr>
             <a:r>
-              <a:rPr sz="1000" b="1" i="0" spc="80">
-                <a:solidFill>
-                  <a:srgbClr val="838CAD"/>
+              <a:rPr sz="1150" b="1" i="0" spc="40">
+                <a:solidFill>
+                  <a:srgbClr val="16203C"/>
                 </a:solidFill>
                 <a:latin typeface="Calibri"/>
               </a:rPr>
-              <a:t>ACTION</a:t>
+              <a:t>HOLDINGS + STATEMENT SOURCE</a:t>
             </a:r>
           </a:p>
           <a:p>
@@ -5133,20 +5020,20 @@
                 <a:spcPct val="105000"/>
               </a:lnSpc>
               <a:spcBef>
-                <a:spcPts val="800"/>
-              </a:spcBef>
-              <a:spcAft>
-                <a:spcPts val="0"/>
-              </a:spcAft>
-            </a:pPr>
-            <a:r>
-              <a:rPr sz="1500" b="1" i="0">
-                <a:solidFill>
-                  <a:srgbClr val="16203C"/>
-                </a:solidFill>
-                <a:latin typeface="Consolas"/>
-              </a:rPr>
-              <a:t>Buy</a:t>
+                <a:spcPts val="600"/>
+              </a:spcBef>
+              <a:spcAft>
+                <a:spcPts val="0"/>
+              </a:spcAft>
+            </a:pPr>
+            <a:r>
+              <a:rPr sz="1150" b="0" i="0">
+                <a:solidFill>
+                  <a:srgbClr val="47517A"/>
+                </a:solidFill>
+                <a:latin typeface="Calibri"/>
+              </a:rPr>
+              <a:t>parsed positions + raw text</a:t>
             </a:r>
           </a:p>
         </p:txBody>
@@ -5159,16 +5046,16 @@
         </p:nvSpPr>
         <p:spPr>
           <a:xfrm>
-            <a:off x="8796528" y="2889504"/>
-            <a:ext cx="2514600" cy="1307592"/>
+            <a:off x="4364736" y="4005072"/>
+            <a:ext cx="3450336" cy="1078992"/>
           </a:xfrm>
           <a:prstGeom prst="roundRect">
             <a:avLst>
-              <a:gd name="adj" fmla="val 9000"/>
+              <a:gd name="adj" fmla="val 8000"/>
             </a:avLst>
           </a:prstGeom>
           <a:solidFill>
-            <a:srgbClr val="FFFFFF"/>
+            <a:srgbClr val="EEF0F6"/>
           </a:solidFill>
           <a:ln w="12700">
             <a:solidFill>
@@ -5192,7 +5079,7 @@
           </a:fontRef>
         </p:style>
         <p:txBody>
-          <a:bodyPr rtlCol="0" anchor="t" lIns="146304" rIns="146304" tIns="109728" bIns="109728" wrap="square"/>
+          <a:bodyPr rtlCol="0" anchor="ctr" lIns="146304" rIns="146304" tIns="109728" bIns="109728" wrap="square"/>
           <a:lstStyle/>
           <a:p>
             <a:pPr algn="l">
@@ -5207,13 +5094,13 @@
               </a:spcAft>
             </a:pPr>
             <a:r>
-              <a:rPr sz="1000" b="1" i="0" spc="80">
-                <a:solidFill>
-                  <a:srgbClr val="838CAD"/>
+              <a:rPr sz="1150" b="1" i="0" spc="40">
+                <a:solidFill>
+                  <a:srgbClr val="16203C"/>
                 </a:solidFill>
                 <a:latin typeface="Calibri"/>
               </a:rPr>
-              <a:t>LEVEL (COPIED)</a:t>
+              <a:t>RESEARCH / OTHER DOCUMENTS</a:t>
             </a:r>
           </a:p>
           <a:p>
@@ -5222,34 +5109,123 @@
                 <a:spcPct val="105000"/>
               </a:lnSpc>
               <a:spcBef>
-                <a:spcPts val="800"/>
-              </a:spcBef>
-              <a:spcAft>
-                <a:spcPts val="0"/>
-              </a:spcAft>
-            </a:pPr>
-            <a:r>
-              <a:rPr sz="1500" b="1" i="0">
-                <a:solidFill>
-                  <a:srgbClr val="9C7422"/>
-                </a:solidFill>
-                <a:latin typeface="Consolas"/>
-              </a:rPr>
-              <a:t>USD 4,000/oz</a:t>
-            </a:r>
-          </a:p>
-        </p:txBody>
-      </p:sp>
-      <p:sp>
-        <p:nvSpPr>
-          <p:cNvPr id="11" name="TextBox 10"/>
+                <a:spcPts val="600"/>
+              </a:spcBef>
+              <a:spcAft>
+                <a:spcPts val="0"/>
+              </a:spcAft>
+            </a:pPr>
+            <a:r>
+              <a:rPr sz="1150" b="0" i="0">
+                <a:solidFill>
+                  <a:srgbClr val="47517A"/>
+                </a:solidFill>
+                <a:latin typeface="Calibri"/>
+              </a:rPr>
+              <a:t>full text, as context</a:t>
+            </a:r>
+          </a:p>
+        </p:txBody>
+      </p:sp>
+      <p:sp>
+        <p:nvSpPr>
+          <p:cNvPr id="11" name="Rounded Rectangle 10"/>
+          <p:cNvSpPr/>
+          <p:nvPr/>
+        </p:nvSpPr>
+        <p:spPr>
+          <a:xfrm>
+            <a:off x="7943088" y="4005072"/>
+            <a:ext cx="3450336" cy="1078992"/>
+          </a:xfrm>
+          <a:prstGeom prst="roundRect">
+            <a:avLst>
+              <a:gd name="adj" fmla="val 8000"/>
+            </a:avLst>
+          </a:prstGeom>
+          <a:solidFill>
+            <a:srgbClr val="EEF0F6"/>
+          </a:solidFill>
+          <a:ln w="12700">
+            <a:solidFill>
+              <a:srgbClr val="DFE2EE"/>
+            </a:solidFill>
+          </a:ln>
+          <a:effectLst/>
+        </p:spPr>
+        <p:style>
+          <a:lnRef idx="1">
+            <a:schemeClr val="accent1"/>
+          </a:lnRef>
+          <a:fillRef idx="3">
+            <a:schemeClr val="accent1"/>
+          </a:fillRef>
+          <a:effectRef idx="2">
+            <a:schemeClr val="accent1"/>
+          </a:effectRef>
+          <a:fontRef idx="minor">
+            <a:schemeClr val="lt1"/>
+          </a:fontRef>
+        </p:style>
+        <p:txBody>
+          <a:bodyPr rtlCol="0" anchor="ctr" lIns="146304" rIns="146304" tIns="109728" bIns="109728" wrap="square"/>
+          <a:lstStyle/>
+          <a:p>
+            <a:pPr algn="l">
+              <a:lnSpc>
+                <a:spcPct val="100000"/>
+              </a:lnSpc>
+              <a:spcBef>
+                <a:spcPts val="0"/>
+              </a:spcBef>
+              <a:spcAft>
+                <a:spcPts val="0"/>
+              </a:spcAft>
+            </a:pPr>
+            <a:r>
+              <a:rPr sz="1150" b="1" i="0" spc="40">
+                <a:solidFill>
+                  <a:srgbClr val="16203C"/>
+                </a:solidFill>
+                <a:latin typeface="Calibri"/>
+              </a:rPr>
+              <a:t>TACTICAL INSTRUCTIONS</a:t>
+            </a:r>
+          </a:p>
+          <a:p>
+            <a:pPr algn="l">
+              <a:lnSpc>
+                <a:spcPct val="105000"/>
+              </a:lnSpc>
+              <a:spcBef>
+                <a:spcPts val="600"/>
+              </a:spcBef>
+              <a:spcAft>
+                <a:spcPts val="0"/>
+              </a:spcAft>
+            </a:pPr>
+            <a:r>
+              <a:rPr sz="1150" b="0" i="0">
+                <a:solidFill>
+                  <a:srgbClr val="47517A"/>
+                </a:solidFill>
+                <a:latin typeface="Calibri"/>
+              </a:rPr>
+              <a:t>the client's words, verbatim</a:t>
+            </a:r>
+          </a:p>
+        </p:txBody>
+      </p:sp>
+      <p:sp>
+        <p:nvSpPr>
+          <p:cNvPr id="12" name="TextBox 11"/>
           <p:cNvSpPr txBox="1"/>
           <p:nvPr/>
         </p:nvSpPr>
         <p:spPr>
           <a:xfrm>
-            <a:off x="786384" y="4617720"/>
-            <a:ext cx="10607040" cy="822960"/>
+            <a:off x="786384" y="5394960"/>
+            <a:ext cx="10607040" cy="731520"/>
           </a:xfrm>
           <a:prstGeom prst="rect">
             <a:avLst/>
@@ -5260,45 +5236,25 @@
           <a:bodyPr wrap="square" anchor="t"/>
           <a:lstStyle/>
           <a:p>
-            <a:r>
-              <a:rPr sz="1250">
-                <a:solidFill>
-                  <a:srgbClr val="47517A"/>
+            <a:pPr algn="l">
+              <a:lnSpc>
+                <a:spcPct val="110000"/>
+              </a:lnSpc>
+              <a:spcBef>
+                <a:spcPts val="0"/>
+              </a:spcBef>
+              <a:spcAft>
+                <a:spcPts val="0"/>
+              </a:spcAft>
+            </a:pPr>
+            <a:r>
+              <a:rPr sz="1250" b="1" i="0">
+                <a:solidFill>
+                  <a:srgbClr val="2F6F57"/>
                 </a:solidFill>
                 <a:latin typeface="Calibri"/>
               </a:rPr>
-              <a:t>From:  </a:t>
-            </a:r>
-            <a:r>
-              <a:rPr sz="1250">
-                <a:solidFill>
-                  <a:srgbClr val="16203C"/>
-                </a:solidFill>
-                <a:latin typeface="Consolas"/>
-              </a:rPr>
-              <a:t>"the gold ETF can be bought below USD 4,000/oz"</a:t>
-            </a:r>
-          </a:p>
-          <a:p>
-            <a:pPr algn="l">
-              <a:lnSpc>
-                <a:spcPct val="100000"/>
-              </a:lnSpc>
-              <a:spcBef>
-                <a:spcPts val="600"/>
-              </a:spcBef>
-              <a:spcAft>
-                <a:spcPts val="0"/>
-              </a:spcAft>
-            </a:pPr>
-            <a:r>
-              <a:rPr sz="1250" b="1" i="0">
-                <a:solidFill>
-                  <a:srgbClr val="2F6F57"/>
-                </a:solidFill>
-                <a:latin typeface="Calibri"/>
-              </a:rPr>
-              <a:t>Nothing computed — just sorted and copied.</a:t>
+              <a:t>Shown on the Proposal page — editable, copyable, downloadable — so the client can read exactly what the system asks the AI Model to do.</a:t>
             </a:r>
           </a:p>
         </p:txBody>
@@ -5410,7 +5366,7 @@
                 </a:solidFill>
                 <a:latin typeface="Calibri"/>
               </a:rPr>
-              <a:t>STEP 2 · THE SPLIT</a:t>
+              <a:t>STEP 2 · GENERATE</a:t>
             </a:r>
           </a:p>
         </p:txBody>
@@ -5453,7 +5409,7 @@
                 </a:solidFill>
                 <a:latin typeface="Georgia"/>
               </a:rPr>
-              <a:t>The items split by what they're for</a:t>
+              <a:t>Read it, edit it, test it anywhere</a:t>
             </a:r>
           </a:p>
         </p:txBody>
@@ -5520,7 +5476,7 @@
                 </a:solidFill>
                 <a:latin typeface="Calibri"/>
               </a:rPr>
-              <a:t>📡   Entry triggers  →  Monitoring watchlist</a:t>
+              <a:t>✨   Generate with the AI Model</a:t>
             </a:r>
           </a:p>
           <a:p>
@@ -5542,7 +5498,7 @@
                 </a:solidFill>
                 <a:latin typeface="Calibri"/>
               </a:rPr>
-              <a:t>Conditional, level-based asks become a live list the portfolio is watched against — the retention hook.</a:t>
+              <a:t>Runs the live AI model on the prompt. Its narrative folds into the proposal deck as a commentary slide. Falls back to a deterministic summary with no key.</a:t>
             </a:r>
           </a:p>
         </p:txBody>
@@ -5555,8 +5511,8 @@
         </p:nvSpPr>
         <p:spPr>
           <a:xfrm>
-            <a:off x="1024128" y="4087368"/>
-            <a:ext cx="4718304" cy="1005840"/>
+            <a:off x="1024128" y="4251960"/>
+            <a:ext cx="4718304" cy="868680"/>
           </a:xfrm>
           <a:prstGeom prst="roundRect">
             <a:avLst>
@@ -5588,65 +5544,28 @@
           </a:fontRef>
         </p:style>
         <p:txBody>
-          <a:bodyPr rtlCol="0" anchor="t" lIns="146304" rIns="146304" tIns="109728" bIns="109728" wrap="square"/>
-          <a:lstStyle/>
-          <a:p>
-            <a:pPr algn="ctr"/>
-            <a:r>
-              <a:rPr sz="1150" b="0">
+          <a:bodyPr rtlCol="0" anchor="ctr" lIns="146304" rIns="146304" tIns="109728" bIns="109728" wrap="square"/>
+          <a:lstStyle/>
+          <a:p>
+            <a:pPr algn="l">
+              <a:lnSpc>
+                <a:spcPct val="110000"/>
+              </a:lnSpc>
+              <a:spcBef>
+                <a:spcPts val="0"/>
+              </a:spcBef>
+              <a:spcAft>
+                <a:spcPts val="0"/>
+              </a:spcAft>
+            </a:pPr>
+            <a:r>
+              <a:rPr sz="1150" b="0" i="0">
                 <a:solidFill>
                   <a:srgbClr val="47517A"/>
                 </a:solidFill>
-                <a:latin typeface="Consolas"/>
-              </a:rPr>
-              <a:t>Gold ETF · below </a:t>
-            </a:r>
-            <a:r>
-              <a:rPr sz="1150" b="1">
-                <a:solidFill>
-                  <a:srgbClr val="9C7422"/>
-                </a:solidFill>
-                <a:latin typeface="Consolas"/>
-              </a:rPr>
-              <a:t>USD 4,000/oz</a:t>
-            </a:r>
-            <a:r>
-              <a:rPr sz="1150" b="0">
-                <a:solidFill>
-                  <a:srgbClr val="47517A"/>
-                </a:solidFill>
-                <a:latin typeface="Consolas"/>
-              </a:rPr>
-              <a:t> · Buy</a:t>
-            </a:r>
-          </a:p>
-          <a:p>
-            <a:r>
-              <a:rPr sz="1150" b="0">
-                <a:solidFill>
-                  <a:srgbClr val="47517A"/>
-                </a:solidFill>
-                <a:latin typeface="Consolas"/>
-              </a:rPr>
-              <a:t>S&amp;P 500 ETF · </a:t>
-            </a:r>
-            <a:r>
-              <a:rPr sz="1150" b="1">
-                <a:solidFill>
-                  <a:srgbClr val="9C7422"/>
-                </a:solidFill>
-                <a:latin typeface="Consolas"/>
-              </a:rPr>
-              <a:t>−15% to −20%</a:t>
-            </a:r>
-            <a:r>
-              <a:rPr sz="1150" b="0">
-                <a:solidFill>
-                  <a:srgbClr val="47517A"/>
-                </a:solidFill>
-                <a:latin typeface="Consolas"/>
-              </a:rPr>
-              <a:t> from high</a:t>
+                <a:latin typeface="Calibri"/>
+              </a:rPr>
+              <a:t>Model-agnostic UI — the button and badge read “AI Model”, never a vendor name.</a:t>
             </a:r>
           </a:p>
         </p:txBody>
@@ -5713,7 +5632,7 @@
                 </a:solidFill>
                 <a:latin typeface="Calibri"/>
               </a:rPr>
-              <a:t>🧭   Every item  →  Analyst guidance</a:t>
+              <a:t>📋   Copy into any AI model</a:t>
             </a:r>
           </a:p>
           <a:p>
@@ -5735,7 +5654,7 @@
                 </a:solidFill>
                 <a:latin typeface="Calibri"/>
               </a:rPr>
-              <a:t>All items (including the triggers) carry forward as intent that shapes the written advice — never as figures.</a:t>
+              <a:t>The prompt is self-contained, so pasting it verbatim into any external AI model reproduces the proposal — the way the client tests the system across models.</a:t>
             </a:r>
           </a:p>
         </p:txBody>
@@ -5748,8 +5667,8 @@
         </p:nvSpPr>
         <p:spPr>
           <a:xfrm>
-            <a:off x="6437376" y="4087368"/>
-            <a:ext cx="4718304" cy="1005840"/>
+            <a:off x="6437376" y="4251960"/>
+            <a:ext cx="4718304" cy="868680"/>
           </a:xfrm>
           <a:prstGeom prst="roundRect">
             <a:avLst>
@@ -5781,7 +5700,7 @@
           </a:fontRef>
         </p:style>
         <p:txBody>
-          <a:bodyPr rtlCol="0" anchor="t" lIns="146304" rIns="146304" tIns="109728" bIns="109728" wrap="square"/>
+          <a:bodyPr rtlCol="0" anchor="ctr" lIns="146304" rIns="146304" tIns="109728" bIns="109728" wrap="square"/>
           <a:lstStyle/>
           <a:p>
             <a:pPr algn="l">
@@ -5796,57 +5715,13 @@
               </a:spcAft>
             </a:pPr>
             <a:r>
-              <a:rPr sz="1100" b="0" i="0">
+              <a:rPr sz="1150" b="0" i="0">
                 <a:solidFill>
                   <a:srgbClr val="47517A"/>
                 </a:solidFill>
-                <a:latin typeface="Consolas"/>
-              </a:rPr>
-              <a:t>Execution style · "buy in tranches"</a:t>
-            </a:r>
-          </a:p>
-          <a:p>
-            <a:pPr algn="l">
-              <a:lnSpc>
-                <a:spcPct val="110000"/>
-              </a:lnSpc>
-              <a:spcBef>
-                <a:spcPts val="300"/>
-              </a:spcBef>
-              <a:spcAft>
-                <a:spcPts val="0"/>
-              </a:spcAft>
-            </a:pPr>
-            <a:r>
-              <a:rPr sz="1100" b="0" i="0">
-                <a:solidFill>
-                  <a:srgbClr val="47517A"/>
-                </a:solidFill>
-                <a:latin typeface="Consolas"/>
-              </a:rPr>
-              <a:t>Selection criteria · "low fees, good liquidity"</a:t>
-            </a:r>
-          </a:p>
-          <a:p>
-            <a:pPr algn="l">
-              <a:lnSpc>
-                <a:spcPct val="110000"/>
-              </a:lnSpc>
-              <a:spcBef>
-                <a:spcPts val="300"/>
-              </a:spcBef>
-              <a:spcAft>
-                <a:spcPts val="0"/>
-              </a:spcAft>
-            </a:pPr>
-            <a:r>
-              <a:rPr sz="1100" b="0" i="0">
-                <a:solidFill>
-                  <a:srgbClr val="47517A"/>
-                </a:solidFill>
-                <a:latin typeface="Consolas"/>
-              </a:rPr>
-              <a:t>Open question · "impact of rate hikes?"</a:t>
+                <a:latin typeface="Calibri"/>
+              </a:rPr>
+              <a:t>Edit before generating; the FACTS block stays the only source of numbers.</a:t>
             </a:r>
           </a:p>
         </p:txBody>
@@ -5913,7 +5788,7 @@
                 </a:solidFill>
                 <a:latin typeface="Calibri"/>
               </a:rPr>
-              <a:t>⚠️  Anything ambiguous is typed needs-clarification and held out of the proposal until resolved. If the client stated target weights, Confirm surfaces a Proposed allocation to Apply.</a:t>
+              <a:t>🧠  Both paths use the same prompt. There is no classification, review table, or enforcement step in between — the analyst reviews the prompt itself.</a:t>
             </a:r>
           </a:p>
         </p:txBody>
@@ -6025,7 +5900,7 @@
                 </a:solidFill>
                 <a:latin typeface="Calibri"/>
               </a:rPr>
-              <a:t>STEP 3 · WHERE THEY APPEAR</a:t>
+              <a:t>STEP 3 · THE PROPOSAL</a:t>
             </a:r>
           </a:p>
         </p:txBody>
@@ -6068,7 +5943,7 @@
                 </a:solidFill>
                 <a:latin typeface="Georgia"/>
               </a:rPr>
-              <a:t>Three places the analyst sees them</a:t>
+              <a:t>AI prose around deterministic tables</a:t>
             </a:r>
           </a:p>
         </p:txBody>
@@ -6135,7 +6010,7 @@
                 </a:solidFill>
                 <a:latin typeface="Calibri"/>
               </a:rPr>
-              <a:t>📡</a:t>
+              <a:t>🧠</a:t>
             </a:r>
           </a:p>
           <a:p>
@@ -6157,7 +6032,7 @@
                 </a:solidFill>
                 <a:latin typeface="Calibri"/>
               </a:rPr>
-              <a:t>Monitoring watchlist</a:t>
+              <a:t>The prompt</a:t>
             </a:r>
           </a:p>
           <a:p>
@@ -6179,52 +6054,7 @@
                 </a:solidFill>
                 <a:latin typeface="Calibri"/>
               </a:rPr>
-              <a:t>Triggers, ready to watch the book against.</a:t>
-            </a:r>
-          </a:p>
-          <a:p>
-            <a:pPr>
-              <a:spcBef>
-                <a:spcPts val="1000"/>
-              </a:spcBef>
-            </a:pPr>
-            <a:r>
-              <a:rPr sz="1100" b="1">
-                <a:solidFill>
-                  <a:srgbClr val="16203C"/>
-                </a:solidFill>
-                <a:latin typeface="Consolas"/>
-              </a:rPr>
-              <a:t>S&amp;P 500 ETF  </a:t>
-            </a:r>
-            <a:r>
-              <a:rPr sz="1100" b="0">
-                <a:solidFill>
-                  <a:srgbClr val="9C7422"/>
-                </a:solidFill>
-                <a:latin typeface="Consolas"/>
-              </a:rPr>
-              <a:t>−15/−20%</a:t>
-            </a:r>
-          </a:p>
-          <a:p>
-            <a:r>
-              <a:rPr sz="1100" b="1">
-                <a:solidFill>
-                  <a:srgbClr val="16203C"/>
-                </a:solidFill>
-                <a:latin typeface="Consolas"/>
-              </a:rPr>
-              <a:t>Gold ETF  </a:t>
-            </a:r>
-            <a:r>
-              <a:rPr sz="1100" b="0">
-                <a:solidFill>
-                  <a:srgbClr val="9C7422"/>
-                </a:solidFill>
-                <a:latin typeface="Consolas"/>
-              </a:rPr>
-              <a:t>&lt; $4,000</a:t>
+              <a:t>On the Proposal page — exactly what the AI Model was asked to do.</a:t>
             </a:r>
           </a:p>
         </p:txBody>
@@ -6267,7 +6097,7 @@
                 </a:solidFill>
                 <a:latin typeface="Calibri"/>
               </a:rPr>
-              <a:t>IN THE COPILOT</a:t>
+              <a:t>TRANSPARENCY</a:t>
             </a:r>
           </a:p>
         </p:txBody>
@@ -6334,7 +6164,7 @@
                 </a:solidFill>
                 <a:latin typeface="Calibri"/>
               </a:rPr>
-              <a:t>📄</a:t>
+              <a:t>💬</a:t>
             </a:r>
           </a:p>
           <a:p>
@@ -6356,7 +6186,7 @@
                 </a:solidFill>
                 <a:latin typeface="Calibri"/>
               </a:rPr>
-              <a:t>Proposal deck</a:t>
+              <a:t>CIO commentary</a:t>
             </a:r>
           </a:p>
           <a:p>
@@ -6378,7 +6208,7 @@
                 </a:solidFill>
                 <a:latin typeface="Calibri"/>
               </a:rPr>
-              <a:t>Listed under "Analyst notes folded into this proposal" on the data &amp; method slide.</a:t>
+              <a:t>The AI Model's narrative, shaped by the parameters, documents and tactical instructions — quoting only the computed figures.</a:t>
             </a:r>
           </a:p>
         </p:txBody>
@@ -6421,7 +6251,7 @@
                 </a:solidFill>
                 <a:latin typeface="Calibri"/>
               </a:rPr>
-              <a:t>PPTX · PDF</a:t>
+              <a:t>GENERATED PROSE</a:t>
             </a:r>
           </a:p>
         </p:txBody>
@@ -6488,7 +6318,7 @@
                 </a:solidFill>
                 <a:latin typeface="Calibri"/>
               </a:rPr>
-              <a:t>💬</a:t>
+              <a:t>📊</a:t>
             </a:r>
           </a:p>
           <a:p>
@@ -6510,7 +6340,7 @@
                 </a:solidFill>
                 <a:latin typeface="Calibri"/>
               </a:rPr>
-              <a:t>CIO commentary</a:t>
+              <a:t>Deterministic tables</a:t>
             </a:r>
           </a:p>
           <a:p>
@@ -6532,7 +6362,7 @@
                 </a:solidFill>
                 <a:latin typeface="Calibri"/>
               </a:rPr>
-              <a:t>Prose shaped by the guidance — quoting only the computed figures.</a:t>
+              <a:t>Allocation, drift, rebalance and suitability — computed by the engine and unchanged by the AI.</a:t>
             </a:r>
           </a:p>
         </p:txBody>
@@ -6575,7 +6405,7 @@
                 </a:solidFill>
                 <a:latin typeface="Calibri"/>
               </a:rPr>
-              <a:t>GENERATED NARRATIVE</a:t>
+              <a:t>PPTX · PDF</a:t>
             </a:r>
           </a:p>
         </p:txBody>
@@ -6687,7 +6517,7 @@
                 </a:solidFill>
                 <a:latin typeface="Calibri"/>
               </a:rPr>
-              <a:t>STEP 4 · THE GUARDRAIL (V8: TIERED)</a:t>
+              <a:t>THE GUARDRAIL</a:t>
             </a:r>
           </a:p>
         </p:txBody>
@@ -6730,7 +6560,7 @@
                 </a:solidFill>
                 <a:latin typeface="Georgia"/>
               </a:rPr>
-              <a:t>Guidance can gate a number — never invent one</a:t>
+              <a:t>The AI writes prose — never a number</a:t>
             </a:r>
           </a:p>
         </p:txBody>
@@ -6797,7 +6627,7 @@
                 </a:solidFill>
                 <a:latin typeface="Calibri"/>
               </a:rPr>
-              <a:t>GUIDANCE CAN SHAPE &amp; GATE</a:t>
+              <a:t>THE AI MODEL CAN SHAPE</a:t>
             </a:r>
           </a:p>
           <a:p>
@@ -6819,7 +6649,7 @@
                 </a:solidFill>
                 <a:latin typeface="Calibri"/>
               </a:rPr>
-              <a:t>•  The monitoring watchlist &amp; the commentary</a:t>
+              <a:t>•  The CIO commentary and how it reads</a:t>
             </a:r>
           </a:p>
           <a:p>
@@ -6841,7 +6671,7 @@
                 </a:solidFill>
                 <a:latin typeface="Calibri"/>
               </a:rPr>
-              <a:t>•  🔒 Enforced trigger gates a rebalance buy (→ hold) vs a sourced live price</a:t>
+              <a:t>•  Which considerations to weigh, from the documents &amp; instructions</a:t>
             </a:r>
           </a:p>
           <a:p>
@@ -6863,7 +6693,7 @@
                 </a:solidFill>
                 <a:latin typeface="Calibri"/>
               </a:rPr>
-              <a:t>•  What the analyst is prompted to weigh</a:t>
+              <a:t>•  The emphasis and ordering of the narrative</a:t>
             </a:r>
           </a:p>
         </p:txBody>
@@ -6930,7 +6760,7 @@
                 </a:solidFill>
                 <a:latin typeface="Calibri"/>
               </a:rPr>
-              <a:t>GUIDANCE NEVER INVENTS</a:t>
+              <a:t>THE AI MODEL NEVER INVENTS</a:t>
             </a:r>
           </a:p>
           <a:p>
@@ -6952,7 +6782,7 @@
                 </a:solidFill>
                 <a:latin typeface="Calibri"/>
               </a:rPr>
-              <a:t>•  A figure from thin air — enforced checks use a price with provenance</a:t>
+              <a:t>•  A figure — every number comes from the FACTS block</a:t>
             </a:r>
           </a:p>
           <a:p>
@@ -6974,7 +6804,7 @@
                 </a:solidFill>
                 <a:latin typeface="Calibri"/>
               </a:rPr>
-              <a:t>•  Suitability thresholds</a:t>
+              <a:t>•  Suitability thresholds or the rebalance</a:t>
             </a:r>
           </a:p>
           <a:p>
@@ -7039,7 +6869,7 @@
                 </a:solidFill>
                 <a:latin typeface="Georgia"/>
               </a:rPr>
-              <a:t>Each item is tiered 🔒 enforced / 📡 monitored / 📝 advisory. A client's condition can gate or flag a trade — never fabricate one.</a:t>
+              <a:t>Qualitative claims drawn from the client's documents are context — not independently verified. Every figure is computed deterministically by the engine.</a:t>
             </a:r>
           </a:p>
         </p:txBody>
